--- a/examples/ppt/charts/charts-scatter.pptx
+++ b/examples/ppt/charts/charts-scatter.pptx
@@ -5,14 +5,15 @@
     <p:sldMasterId xmlns:r="http://schemas.openxmlformats.org/officeDocument/2006/relationships" id="2147483648" r:id="rId1"/>
   </p:sldMasterIdLst>
   <p:sldIdLst>
-    <p:sldId id="256" r:id="R58477f20501e4d4e"/>
-    <p:sldId id="257" r:id="R2394c5f825084b4f"/>
-    <p:sldId id="258" r:id="R5287b8000da3483c"/>
-    <p:sldId id="259" r:id="R95d28a6c8d3b45db"/>
-    <p:sldId id="260" r:id="Ra58123b47b1b4721"/>
-    <p:sldId id="261" r:id="Rc394d86cc23c42f7"/>
-    <p:sldId id="262" r:id="R606e7bee61034a72"/>
-    <p:sldId id="263" r:id="R9d7c9f514f304a5d"/>
+    <p:sldId id="256" r:id="R6036c67fd47d4403"/>
+    <p:sldId id="257" r:id="R1e40e26c0d8e4466"/>
+    <p:sldId id="258" r:id="R62ec1a52dc6c427b"/>
+    <p:sldId id="259" r:id="R4bb12ce18417407d"/>
+    <p:sldId id="260" r:id="R4b90807ef4e14a81"/>
+    <p:sldId id="261" r:id="R0f3c9b4537a6474e"/>
+    <p:sldId id="262" r:id="Rf9fab46d1e784085"/>
+    <p:sldId id="263" r:id="R7a70ea1a258c468d"/>
+    <p:sldId id="264" r:id="R5faf14e6877b4c6e"/>
   </p:sldIdLst>
   <p:sldSz cx="12192000" cy="6858000"/>
   <p:notesSz cx="6858000" cy="9144000"/>
@@ -876,7 +877,24 @@
 <file path=ppt/slides/charts/chart12.xml><?xml version="1.0" encoding="utf-8"?>
 <c:chartSpace xmlns:c="http://schemas.openxmlformats.org/drawingml/2006/chart">
   <c:chart>
-    <c:autoTitleDeleted val="1"/>
+    <c:title>
+      <c:tx>
+        <c:rich>
+          <a:bodyPr xmlns:a="http://schemas.openxmlformats.org/drawingml/2006/main"/>
+          <a:lstStyle xmlns:a="http://schemas.openxmlformats.org/drawingml/2006/main"/>
+          <a:p xmlns:a="http://schemas.openxmlformats.org/drawingml/2006/main">
+            <a:pPr>
+              <a:defRPr sz="1400" b="1"/>
+            </a:pPr>
+            <a:r>
+              <a:rPr lang="en-US" sz="1400" b="1"/>
+              <a:t>title.overlay=true</a:t>
+            </a:r>
+          </a:p>
+        </c:rich>
+      </c:tx>
+      <c:overlay val="1"/>
+    </c:title>
     <c:plotArea>
       <c:layout/>
       <c:scatterChart>
@@ -1178,10 +1196,12 @@
             <a:lstStyle xmlns:a="http://schemas.openxmlformats.org/drawingml/2006/main"/>
             <a:p xmlns:a="http://schemas.openxmlformats.org/drawingml/2006/main">
               <a:pPr>
-                <a:defRPr sz="900" b="0">
+                <a:defRPr sz="900">
                   <a:solidFill>
                     <a:srgbClr val="333333"/>
                   </a:solidFill>
+                  <a:latin typeface="Calibri"/>
+                  <a:ea typeface="Calibri"/>
                 </a:defRPr>
               </a:pPr>
             </a:p>
@@ -2613,6 +2633,9 @@
             <c:v>A</c:v>
           </c:tx>
           <c:spPr>
+            <a:solidFill xmlns:a="http://schemas.openxmlformats.org/drawingml/2006/main">
+              <a:srgbClr val="4472C4"/>
+            </a:solidFill>
             <a:ln xmlns:a="http://schemas.openxmlformats.org/drawingml/2006/main" w="6350">
               <a:solidFill>
                 <a:srgbClr val="000000"/>
@@ -2685,6 +2708,9 @@
             <c:v>B</c:v>
           </c:tx>
           <c:spPr>
+            <a:solidFill xmlns:a="http://schemas.openxmlformats.org/drawingml/2006/main">
+              <a:srgbClr val="ED7D31"/>
+            </a:solidFill>
             <a:ln xmlns:a="http://schemas.openxmlformats.org/drawingml/2006/main" w="6350">
               <a:solidFill>
                 <a:srgbClr val="000000"/>
@@ -5305,6 +5331,680 @@
 </c:chartSpace>
 </file>
 
+<file path=ppt/slides/charts/chart33.xml><?xml version="1.0" encoding="utf-8"?>
+<c:chartSpace xmlns:c="http://schemas.openxmlformats.org/drawingml/2006/chart">
+  <c:chart>
+    <c:title>
+      <c:tx>
+        <c:rich>
+          <a:bodyPr xmlns:a="http://schemas.openxmlformats.org/drawingml/2006/main"/>
+          <a:lstStyle xmlns:a="http://schemas.openxmlformats.org/drawingml/2006/main"/>
+          <a:p xmlns:a="http://schemas.openxmlformats.org/drawingml/2006/main">
+            <a:pPr>
+              <a:defRPr sz="1400" b="1"/>
+            </a:pPr>
+            <a:r>
+              <a:rPr lang="en-US" sz="1400" b="1"/>
+              <a:t>series1= + series2=</a:t>
+            </a:r>
+          </a:p>
+        </c:rich>
+      </c:tx>
+      <c:overlay val="0"/>
+    </c:title>
+    <c:plotArea>
+      <c:layout/>
+      <c:scatterChart>
+        <c:scatterStyle val="lineMarker"/>
+        <c:varyColors val="0"/>
+        <c:ser>
+          <c:idx val="0"/>
+          <c:order val="0"/>
+          <c:tx>
+            <c:v>Alpha</c:v>
+          </c:tx>
+          <c:xVal>
+            <c:numLit>
+              <c:ptCount val="4"/>
+              <c:pt idx="0">
+                <c:v>1</c:v>
+              </c:pt>
+              <c:pt idx="1">
+                <c:v>2</c:v>
+              </c:pt>
+              <c:pt idx="2">
+                <c:v>3</c:v>
+              </c:pt>
+              <c:pt idx="3">
+                <c:v>4</c:v>
+              </c:pt>
+            </c:numLit>
+          </c:xVal>
+          <c:yVal>
+            <c:numLit>
+              <c:ptCount val="4"/>
+              <c:pt idx="0">
+                <c:v>10</c:v>
+              </c:pt>
+              <c:pt idx="1">
+                <c:v>25</c:v>
+              </c:pt>
+              <c:pt idx="2">
+                <c:v>18</c:v>
+              </c:pt>
+              <c:pt idx="3">
+                <c:v>40</c:v>
+              </c:pt>
+            </c:numLit>
+          </c:yVal>
+        </c:ser>
+        <c:ser>
+          <c:idx val="1"/>
+          <c:order val="1"/>
+          <c:tx>
+            <c:v>Beta</c:v>
+          </c:tx>
+          <c:xVal>
+            <c:numLit>
+              <c:ptCount val="4"/>
+              <c:pt idx="0">
+                <c:v>1</c:v>
+              </c:pt>
+              <c:pt idx="1">
+                <c:v>2</c:v>
+              </c:pt>
+              <c:pt idx="2">
+                <c:v>3</c:v>
+              </c:pt>
+              <c:pt idx="3">
+                <c:v>4</c:v>
+              </c:pt>
+            </c:numLit>
+          </c:xVal>
+          <c:yVal>
+            <c:numLit>
+              <c:ptCount val="4"/>
+              <c:pt idx="0">
+                <c:v>5</c:v>
+              </c:pt>
+              <c:pt idx="1">
+                <c:v>15</c:v>
+              </c:pt>
+              <c:pt idx="2">
+                <c:v>12</c:v>
+              </c:pt>
+              <c:pt idx="3">
+                <c:v>30</c:v>
+              </c:pt>
+            </c:numLit>
+          </c:yVal>
+        </c:ser>
+        <c:axId val="1"/>
+        <c:axId val="2"/>
+      </c:scatterChart>
+      <c:valAx>
+        <c:axId val="1"/>
+        <c:scaling>
+          <c:orientation val="minMax"/>
+        </c:scaling>
+        <c:delete val="0"/>
+        <c:axPos val="b"/>
+        <c:majorGridlines/>
+        <c:numFmt formatCode="General" sourceLinked="1"/>
+        <c:majorTickMark val="out"/>
+        <c:minorTickMark val="none"/>
+        <c:tickLblPos val="nextTo"/>
+        <c:crossAx val="2"/>
+        <c:crosses val="autoZero"/>
+        <c:crossBetween val="between"/>
+      </c:valAx>
+      <c:valAx>
+        <c:axId val="2"/>
+        <c:scaling>
+          <c:orientation val="minMax"/>
+        </c:scaling>
+        <c:delete val="0"/>
+        <c:axPos val="l"/>
+        <c:majorGridlines/>
+        <c:numFmt formatCode="General" sourceLinked="1"/>
+        <c:majorTickMark val="out"/>
+        <c:minorTickMark val="none"/>
+        <c:tickLblPos val="nextTo"/>
+        <c:crossAx val="1"/>
+        <c:crosses val="autoZero"/>
+        <c:crossBetween val="between"/>
+      </c:valAx>
+    </c:plotArea>
+    <c:legend>
+      <c:legendPos val="b"/>
+      <c:overlay val="0"/>
+    </c:legend>
+    <c:plotVisOnly val="1"/>
+    <c:dispBlanksAs val="gap"/>
+  </c:chart>
+</c:chartSpace>
+</file>
+
+<file path=ppt/slides/charts/chart34.xml><?xml version="1.0" encoding="utf-8"?>
+<c:chartSpace xmlns:c="http://schemas.openxmlformats.org/drawingml/2006/chart">
+  <c:chart>
+    <c:title>
+      <c:tx>
+        <c:rich>
+          <a:bodyPr xmlns:a="http://schemas.openxmlformats.org/drawingml/2006/main"/>
+          <a:lstStyle xmlns:a="http://schemas.openxmlformats.org/drawingml/2006/main"/>
+          <a:p xmlns:a="http://schemas.openxmlformats.org/drawingml/2006/main">
+            <a:pPr>
+              <a:defRPr sz="1400" b="1"/>
+            </a:pPr>
+            <a:r>
+              <a:rPr lang="en-US" sz="1400" b="1"/>
+              <a:t>three named series</a:t>
+            </a:r>
+          </a:p>
+        </c:rich>
+      </c:tx>
+      <c:overlay val="0"/>
+    </c:title>
+    <c:plotArea>
+      <c:layout/>
+      <c:scatterChart>
+        <c:scatterStyle val="marker"/>
+        <c:varyColors val="0"/>
+        <c:ser>
+          <c:idx val="0"/>
+          <c:order val="0"/>
+          <c:tx>
+            <c:v>Group A</c:v>
+          </c:tx>
+          <c:spPr>
+            <a:ln xmlns:a="http://schemas.openxmlformats.org/drawingml/2006/main">
+              <a:noFill/>
+            </a:ln>
+          </c:spPr>
+          <c:xVal>
+            <c:numLit>
+              <c:ptCount val="3"/>
+              <c:pt idx="0">
+                <c:v>1</c:v>
+              </c:pt>
+              <c:pt idx="1">
+                <c:v>2</c:v>
+              </c:pt>
+              <c:pt idx="2">
+                <c:v>3</c:v>
+              </c:pt>
+            </c:numLit>
+          </c:xVal>
+          <c:yVal>
+            <c:numLit>
+              <c:ptCount val="3"/>
+              <c:pt idx="0">
+                <c:v>8</c:v>
+              </c:pt>
+              <c:pt idx="1">
+                <c:v>20</c:v>
+              </c:pt>
+              <c:pt idx="2">
+                <c:v>15</c:v>
+              </c:pt>
+            </c:numLit>
+          </c:yVal>
+        </c:ser>
+        <c:ser>
+          <c:idx val="1"/>
+          <c:order val="1"/>
+          <c:tx>
+            <c:v>Group B</c:v>
+          </c:tx>
+          <c:spPr>
+            <a:ln xmlns:a="http://schemas.openxmlformats.org/drawingml/2006/main">
+              <a:noFill/>
+            </a:ln>
+          </c:spPr>
+          <c:xVal>
+            <c:numLit>
+              <c:ptCount val="3"/>
+              <c:pt idx="0">
+                <c:v>1</c:v>
+              </c:pt>
+              <c:pt idx="1">
+                <c:v>2</c:v>
+              </c:pt>
+              <c:pt idx="2">
+                <c:v>3</c:v>
+              </c:pt>
+            </c:numLit>
+          </c:xVal>
+          <c:yVal>
+            <c:numLit>
+              <c:ptCount val="3"/>
+              <c:pt idx="0">
+                <c:v>4</c:v>
+              </c:pt>
+              <c:pt idx="1">
+                <c:v>12</c:v>
+              </c:pt>
+              <c:pt idx="2">
+                <c:v>10</c:v>
+              </c:pt>
+            </c:numLit>
+          </c:yVal>
+        </c:ser>
+        <c:ser>
+          <c:idx val="2"/>
+          <c:order val="2"/>
+          <c:tx>
+            <c:v>Group C</c:v>
+          </c:tx>
+          <c:spPr>
+            <a:ln xmlns:a="http://schemas.openxmlformats.org/drawingml/2006/main">
+              <a:noFill/>
+            </a:ln>
+          </c:spPr>
+          <c:xVal>
+            <c:numLit>
+              <c:ptCount val="3"/>
+              <c:pt idx="0">
+                <c:v>1</c:v>
+              </c:pt>
+              <c:pt idx="1">
+                <c:v>2</c:v>
+              </c:pt>
+              <c:pt idx="2">
+                <c:v>3</c:v>
+              </c:pt>
+            </c:numLit>
+          </c:xVal>
+          <c:yVal>
+            <c:numLit>
+              <c:ptCount val="3"/>
+              <c:pt idx="0">
+                <c:v>12</c:v>
+              </c:pt>
+              <c:pt idx="1">
+                <c:v>28</c:v>
+              </c:pt>
+              <c:pt idx="2">
+                <c:v>22</c:v>
+              </c:pt>
+            </c:numLit>
+          </c:yVal>
+        </c:ser>
+        <c:axId val="1"/>
+        <c:axId val="2"/>
+      </c:scatterChart>
+      <c:valAx>
+        <c:axId val="1"/>
+        <c:scaling>
+          <c:orientation val="minMax"/>
+        </c:scaling>
+        <c:delete val="0"/>
+        <c:axPos val="b"/>
+        <c:majorGridlines/>
+        <c:numFmt formatCode="General" sourceLinked="1"/>
+        <c:majorTickMark val="out"/>
+        <c:minorTickMark val="none"/>
+        <c:tickLblPos val="nextTo"/>
+        <c:crossAx val="2"/>
+        <c:crosses val="autoZero"/>
+        <c:crossBetween val="between"/>
+      </c:valAx>
+      <c:valAx>
+        <c:axId val="2"/>
+        <c:scaling>
+          <c:orientation val="minMax"/>
+        </c:scaling>
+        <c:delete val="0"/>
+        <c:axPos val="l"/>
+        <c:majorGridlines/>
+        <c:numFmt formatCode="General" sourceLinked="1"/>
+        <c:majorTickMark val="out"/>
+        <c:minorTickMark val="none"/>
+        <c:tickLblPos val="nextTo"/>
+        <c:crossAx val="1"/>
+        <c:crosses val="autoZero"/>
+        <c:crossBetween val="between"/>
+      </c:valAx>
+    </c:plotArea>
+    <c:legend>
+      <c:legendPos val="b"/>
+      <c:overlay val="0"/>
+    </c:legend>
+    <c:plotVisOnly val="1"/>
+    <c:dispBlanksAs val="gap"/>
+  </c:chart>
+</c:chartSpace>
+</file>
+
+<file path=ppt/slides/charts/chart35.xml><?xml version="1.0" encoding="utf-8"?>
+<c:chartSpace xmlns:c="http://schemas.openxmlformats.org/drawingml/2006/chart">
+  <c:chart>
+    <c:title>
+      <c:tx>
+        <c:rich>
+          <a:bodyPr xmlns:a="http://schemas.openxmlformats.org/drawingml/2006/main"/>
+          <a:lstStyle xmlns:a="http://schemas.openxmlformats.org/drawingml/2006/main"/>
+          <a:p xmlns:a="http://schemas.openxmlformats.org/drawingml/2006/main">
+            <a:pPr>
+              <a:defRPr sz="1400" b="1"/>
+            </a:pPr>
+            <a:r>
+              <a:rPr lang="en-US" sz="1400" b="1"/>
+              <a:t>series1 with colors</a:t>
+            </a:r>
+          </a:p>
+        </c:rich>
+      </c:tx>
+      <c:overlay val="0"/>
+    </c:title>
+    <c:plotArea>
+      <c:layout/>
+      <c:scatterChart>
+        <c:scatterStyle val="smoothMarker"/>
+        <c:varyColors val="0"/>
+        <c:ser>
+          <c:idx val="0"/>
+          <c:order val="0"/>
+          <c:tx>
+            <c:v>Rev</c:v>
+          </c:tx>
+          <c:spPr>
+            <a:solidFill xmlns:a="http://schemas.openxmlformats.org/drawingml/2006/main">
+              <a:srgbClr val="4472C4"/>
+            </a:solidFill>
+          </c:spPr>
+          <c:xVal>
+            <c:numLit>
+              <c:ptCount val="4"/>
+              <c:pt idx="0">
+                <c:v>1</c:v>
+              </c:pt>
+              <c:pt idx="1">
+                <c:v>2</c:v>
+              </c:pt>
+              <c:pt idx="2">
+                <c:v>3</c:v>
+              </c:pt>
+              <c:pt idx="3">
+                <c:v>4</c:v>
+              </c:pt>
+            </c:numLit>
+          </c:xVal>
+          <c:yVal>
+            <c:numLit>
+              <c:ptCount val="4"/>
+              <c:pt idx="0">
+                <c:v>30</c:v>
+              </c:pt>
+              <c:pt idx="1">
+                <c:v>45</c:v>
+              </c:pt>
+              <c:pt idx="2">
+                <c:v>55</c:v>
+              </c:pt>
+              <c:pt idx="3">
+                <c:v>70</c:v>
+              </c:pt>
+            </c:numLit>
+          </c:yVal>
+        </c:ser>
+        <c:ser>
+          <c:idx val="1"/>
+          <c:order val="1"/>
+          <c:tx>
+            <c:v>Cost</c:v>
+          </c:tx>
+          <c:spPr>
+            <a:solidFill xmlns:a="http://schemas.openxmlformats.org/drawingml/2006/main">
+              <a:srgbClr val="E63946"/>
+            </a:solidFill>
+          </c:spPr>
+          <c:xVal>
+            <c:numLit>
+              <c:ptCount val="4"/>
+              <c:pt idx="0">
+                <c:v>1</c:v>
+              </c:pt>
+              <c:pt idx="1">
+                <c:v>2</c:v>
+              </c:pt>
+              <c:pt idx="2">
+                <c:v>3</c:v>
+              </c:pt>
+              <c:pt idx="3">
+                <c:v>4</c:v>
+              </c:pt>
+            </c:numLit>
+          </c:xVal>
+          <c:yVal>
+            <c:numLit>
+              <c:ptCount val="4"/>
+              <c:pt idx="0">
+                <c:v>20</c:v>
+              </c:pt>
+              <c:pt idx="1">
+                <c:v>30</c:v>
+              </c:pt>
+              <c:pt idx="2">
+                <c:v>35</c:v>
+              </c:pt>
+              <c:pt idx="3">
+                <c:v>42</c:v>
+              </c:pt>
+            </c:numLit>
+          </c:yVal>
+        </c:ser>
+        <c:axId val="1"/>
+        <c:axId val="2"/>
+      </c:scatterChart>
+      <c:valAx>
+        <c:axId val="1"/>
+        <c:scaling>
+          <c:orientation val="minMax"/>
+        </c:scaling>
+        <c:delete val="0"/>
+        <c:axPos val="b"/>
+        <c:majorGridlines/>
+        <c:numFmt formatCode="General" sourceLinked="1"/>
+        <c:majorTickMark val="out"/>
+        <c:minorTickMark val="none"/>
+        <c:tickLblPos val="nextTo"/>
+        <c:crossAx val="2"/>
+        <c:crosses val="autoZero"/>
+        <c:crossBetween val="between"/>
+      </c:valAx>
+      <c:valAx>
+        <c:axId val="2"/>
+        <c:scaling>
+          <c:orientation val="minMax"/>
+        </c:scaling>
+        <c:delete val="0"/>
+        <c:axPos val="l"/>
+        <c:majorGridlines/>
+        <c:numFmt formatCode="General" sourceLinked="1"/>
+        <c:majorTickMark val="out"/>
+        <c:minorTickMark val="none"/>
+        <c:tickLblPos val="nextTo"/>
+        <c:crossAx val="1"/>
+        <c:crosses val="autoZero"/>
+        <c:crossBetween val="between"/>
+      </c:valAx>
+    </c:plotArea>
+    <c:legend>
+      <c:legendPos val="b"/>
+      <c:overlay val="0"/>
+    </c:legend>
+    <c:plotVisOnly val="1"/>
+    <c:dispBlanksAs val="gap"/>
+  </c:chart>
+</c:chartSpace>
+</file>
+
+<file path=ppt/slides/charts/chart36.xml><?xml version="1.0" encoding="utf-8"?>
+<c:chartSpace xmlns:c="http://schemas.openxmlformats.org/drawingml/2006/chart">
+  <c:chart>
+    <c:title>
+      <c:tx>
+        <c:rich>
+          <a:bodyPr xmlns:a="http://schemas.openxmlformats.org/drawingml/2006/main"/>
+          <a:lstStyle xmlns:a="http://schemas.openxmlformats.org/drawingml/2006/main"/>
+          <a:p xmlns:a="http://schemas.openxmlformats.org/drawingml/2006/main">
+            <a:pPr>
+              <a:defRPr sz="1400" b="1"/>
+            </a:pPr>
+            <a:r>
+              <a:rPr lang="en-US" sz="1400" b="1"/>
+              <a:t>series1.* per-series naming + colors=</a:t>
+            </a:r>
+          </a:p>
+        </c:rich>
+      </c:tx>
+      <c:overlay val="0"/>
+    </c:title>
+    <c:plotArea>
+      <c:layout/>
+      <c:scatterChart>
+        <c:scatterStyle val="marker"/>
+        <c:varyColors val="0"/>
+        <c:ser>
+          <c:idx val="0"/>
+          <c:order val="0"/>
+          <c:tx>
+            <c:v>Alpha</c:v>
+          </c:tx>
+          <c:spPr>
+            <a:solidFill xmlns:a="http://schemas.openxmlformats.org/drawingml/2006/main">
+              <a:srgbClr val="4472C4"/>
+            </a:solidFill>
+          </c:spPr>
+          <c:xVal>
+            <c:numLit>
+              <c:ptCount val="4"/>
+              <c:pt idx="0">
+                <c:v>1</c:v>
+              </c:pt>
+              <c:pt idx="1">
+                <c:v>2</c:v>
+              </c:pt>
+              <c:pt idx="2">
+                <c:v>3</c:v>
+              </c:pt>
+              <c:pt idx="3">
+                <c:v>4</c:v>
+              </c:pt>
+            </c:numLit>
+          </c:xVal>
+          <c:yVal>
+            <c:numLit>
+              <c:ptCount val="4"/>
+              <c:pt idx="0">
+                <c:v>10</c:v>
+              </c:pt>
+              <c:pt idx="1">
+                <c:v>25</c:v>
+              </c:pt>
+              <c:pt idx="2">
+                <c:v>18</c:v>
+              </c:pt>
+              <c:pt idx="3">
+                <c:v>40</c:v>
+              </c:pt>
+            </c:numLit>
+          </c:yVal>
+        </c:ser>
+        <c:ser>
+          <c:idx val="1"/>
+          <c:order val="1"/>
+          <c:tx>
+            <c:v>Beta</c:v>
+          </c:tx>
+          <c:spPr>
+            <a:solidFill xmlns:a="http://schemas.openxmlformats.org/drawingml/2006/main">
+              <a:srgbClr val="E63946"/>
+            </a:solidFill>
+          </c:spPr>
+          <c:xVal>
+            <c:numLit>
+              <c:ptCount val="4"/>
+              <c:pt idx="0">
+                <c:v>1</c:v>
+              </c:pt>
+              <c:pt idx="1">
+                <c:v>2</c:v>
+              </c:pt>
+              <c:pt idx="2">
+                <c:v>3</c:v>
+              </c:pt>
+              <c:pt idx="3">
+                <c:v>4</c:v>
+              </c:pt>
+            </c:numLit>
+          </c:xVal>
+          <c:yVal>
+            <c:numLit>
+              <c:ptCount val="4"/>
+              <c:pt idx="0">
+                <c:v>5</c:v>
+              </c:pt>
+              <c:pt idx="1">
+                <c:v>15</c:v>
+              </c:pt>
+              <c:pt idx="2">
+                <c:v>12</c:v>
+              </c:pt>
+              <c:pt idx="3">
+                <c:v>30</c:v>
+              </c:pt>
+            </c:numLit>
+          </c:yVal>
+        </c:ser>
+        <c:axId val="1"/>
+        <c:axId val="2"/>
+      </c:scatterChart>
+      <c:valAx>
+        <c:axId val="1"/>
+        <c:scaling>
+          <c:orientation val="minMax"/>
+        </c:scaling>
+        <c:delete val="0"/>
+        <c:axPos val="b"/>
+        <c:majorGridlines/>
+        <c:numFmt formatCode="General" sourceLinked="1"/>
+        <c:majorTickMark val="out"/>
+        <c:minorTickMark val="none"/>
+        <c:tickLblPos val="nextTo"/>
+        <c:crossAx val="2"/>
+        <c:crosses val="autoZero"/>
+        <c:crossBetween val="between"/>
+      </c:valAx>
+      <c:valAx>
+        <c:axId val="2"/>
+        <c:scaling>
+          <c:orientation val="minMax"/>
+        </c:scaling>
+        <c:delete val="0"/>
+        <c:axPos val="l"/>
+        <c:majorGridlines/>
+        <c:numFmt formatCode="General" sourceLinked="1"/>
+        <c:majorTickMark val="out"/>
+        <c:minorTickMark val="none"/>
+        <c:tickLblPos val="nextTo"/>
+        <c:crossAx val="1"/>
+        <c:crosses val="autoZero"/>
+        <c:crossBetween val="between"/>
+      </c:valAx>
+    </c:plotArea>
+    <c:legend>
+      <c:legendPos val="b"/>
+      <c:overlay val="0"/>
+    </c:legend>
+    <c:plotVisOnly val="1"/>
+    <c:dispBlanksAs val="gap"/>
+  </c:chart>
+</c:chartSpace>
+</file>
+
 <file path=ppt/slides/charts/chart4.xml><?xml version="1.0" encoding="utf-8"?>
 <c:chartSpace xmlns:c="http://schemas.openxmlformats.org/drawingml/2006/chart">
   <c:chart>
@@ -5941,7 +6641,7 @@
             </a:pPr>
             <a:r>
               <a:rPr lang="en-US" sz="1400" b="1"/>
-              <a:t>triangle:10</a:t>
+              <a:t>markercolor=E63946</a:t>
             </a:r>
           </a:p>
         </c:rich>
@@ -5965,8 +6665,13 @@
             </a:ln>
           </c:spPr>
           <c:marker>
-            <c:symbol val="triangle"/>
+            <c:symbol val="circle"/>
             <c:size val="10"/>
+            <c:spPr>
+              <a:solidFill xmlns:a="http://schemas.openxmlformats.org/drawingml/2006/main">
+                <a:srgbClr val="E63946"/>
+              </a:solidFill>
+            </c:spPr>
           </c:marker>
           <c:xVal>
             <c:numLit>
@@ -6301,8 +7006,8 @@
       <p:grpSpPr/>
       <p:sp>
         <p:nvSpPr>
-          <p:cNvPr id="10000" name="TextBox 1"/>
-          <p:cNvSpPr/>
+          <p:cNvPr id="100000" name="TextBox 1"/>
+          <p:cNvSpPr txBox="1"/>
           <p:nvPr/>
         </p:nvSpPr>
         <p:spPr>
@@ -6329,7 +7034,7 @@
       </p:sp>
       <p:graphicFrame>
         <p:nvGraphicFramePr>
-          <p:cNvPr id="10001" name="scatterstyle=line"/>
+          <p:cNvPr id="100001" name="scatterstyle=line"/>
           <p:cNvGraphicFramePr/>
           <p:nvPr/>
         </p:nvGraphicFramePr>
@@ -6339,13 +7044,13 @@
         </p:xfrm>
         <a:graphic xmlns:a="http://schemas.openxmlformats.org/drawingml/2006/main">
           <a:graphicData uri="http://schemas.openxmlformats.org/drawingml/2006/chart">
-            <c:chart xmlns:r="http://schemas.openxmlformats.org/officeDocument/2006/relationships" xmlns:c="http://schemas.openxmlformats.org/drawingml/2006/chart" r:id="Rcc42538b42c34aad"/>
+            <c:chart xmlns:r="http://schemas.openxmlformats.org/officeDocument/2006/relationships" xmlns:c="http://schemas.openxmlformats.org/drawingml/2006/chart" r:id="Re2185443a8714f21"/>
           </a:graphicData>
         </a:graphic>
       </p:graphicFrame>
       <p:graphicFrame>
         <p:nvGraphicFramePr>
-          <p:cNvPr id="10002" name="scatterstyle=lineMarker"/>
+          <p:cNvPr id="100002" name="scatterstyle=lineMarker"/>
           <p:cNvGraphicFramePr/>
           <p:nvPr/>
         </p:nvGraphicFramePr>
@@ -6355,13 +7060,13 @@
         </p:xfrm>
         <a:graphic xmlns:a="http://schemas.openxmlformats.org/drawingml/2006/main">
           <a:graphicData uri="http://schemas.openxmlformats.org/drawingml/2006/chart">
-            <c:chart xmlns:r="http://schemas.openxmlformats.org/officeDocument/2006/relationships" xmlns:c="http://schemas.openxmlformats.org/drawingml/2006/chart" r:id="R43b733fd2b764071"/>
+            <c:chart xmlns:r="http://schemas.openxmlformats.org/officeDocument/2006/relationships" xmlns:c="http://schemas.openxmlformats.org/drawingml/2006/chart" r:id="Reb3b997aa6044c04"/>
           </a:graphicData>
         </a:graphic>
       </p:graphicFrame>
       <p:graphicFrame>
         <p:nvGraphicFramePr>
-          <p:cNvPr id="10003" name="scatterstyle=marker"/>
+          <p:cNvPr id="100003" name="scatterstyle=marker"/>
           <p:cNvGraphicFramePr/>
           <p:nvPr/>
         </p:nvGraphicFramePr>
@@ -6371,13 +7076,13 @@
         </p:xfrm>
         <a:graphic xmlns:a="http://schemas.openxmlformats.org/drawingml/2006/main">
           <a:graphicData uri="http://schemas.openxmlformats.org/drawingml/2006/chart">
-            <c:chart xmlns:r="http://schemas.openxmlformats.org/officeDocument/2006/relationships" xmlns:c="http://schemas.openxmlformats.org/drawingml/2006/chart" r:id="R32957e3e01644105"/>
+            <c:chart xmlns:r="http://schemas.openxmlformats.org/officeDocument/2006/relationships" xmlns:c="http://schemas.openxmlformats.org/drawingml/2006/chart" r:id="Rf5a7fe58b9714514"/>
           </a:graphicData>
         </a:graphic>
       </p:graphicFrame>
       <p:graphicFrame>
         <p:nvGraphicFramePr>
-          <p:cNvPr id="10004" name="scatterstyle=smoothMarker"/>
+          <p:cNvPr id="100004" name="scatterstyle=smoothMarker"/>
           <p:cNvGraphicFramePr/>
           <p:nvPr/>
         </p:nvGraphicFramePr>
@@ -6387,7 +7092,7 @@
         </p:xfrm>
         <a:graphic xmlns:a="http://schemas.openxmlformats.org/drawingml/2006/main">
           <a:graphicData uri="http://schemas.openxmlformats.org/drawingml/2006/chart">
-            <c:chart xmlns:r="http://schemas.openxmlformats.org/officeDocument/2006/relationships" xmlns:c="http://schemas.openxmlformats.org/drawingml/2006/chart" r:id="R4a7ce8996bcd4b8b"/>
+            <c:chart xmlns:r="http://schemas.openxmlformats.org/officeDocument/2006/relationships" xmlns:c="http://schemas.openxmlformats.org/drawingml/2006/chart" r:id="R14d4a0b5f2434d0e"/>
           </a:graphicData>
         </a:graphic>
       </p:graphicFrame>
@@ -6408,8 +7113,8 @@
       <p:grpSpPr/>
       <p:sp>
         <p:nvSpPr>
-          <p:cNvPr id="10005" name="TextBox 1"/>
-          <p:cNvSpPr/>
+          <p:cNvPr id="100005" name="TextBox 1"/>
+          <p:cNvSpPr txBox="1"/>
           <p:nvPr/>
         </p:nvSpPr>
         <p:spPr>
@@ -6429,14 +7134,14 @@
           <a:p xmlns:a="http://schemas.openxmlformats.org/drawingml/2006/main">
             <a:r>
               <a:rPr lang="en-US" sz="2400" b="1"/>
-              <a:t>Markers — symbol / size / color</a:t>
+              <a:t>Markers — symbol / size / color / markercolor</a:t>
             </a:r>
           </a:p>
         </p:txBody>
       </p:sp>
       <p:graphicFrame>
         <p:nvGraphicFramePr>
-          <p:cNvPr id="10006" name="circle:10:FF0000"/>
+          <p:cNvPr id="100006" name="circle:10:FF0000"/>
           <p:cNvGraphicFramePr/>
           <p:nvPr/>
         </p:nvGraphicFramePr>
@@ -6446,13 +7151,13 @@
         </p:xfrm>
         <a:graphic xmlns:a="http://schemas.openxmlformats.org/drawingml/2006/main">
           <a:graphicData uri="http://schemas.openxmlformats.org/drawingml/2006/chart">
-            <c:chart xmlns:r="http://schemas.openxmlformats.org/officeDocument/2006/relationships" xmlns:c="http://schemas.openxmlformats.org/drawingml/2006/chart" r:id="Rb269cc6a2f934356"/>
+            <c:chart xmlns:r="http://schemas.openxmlformats.org/officeDocument/2006/relationships" xmlns:c="http://schemas.openxmlformats.org/drawingml/2006/chart" r:id="R27ca520ae9cf4e52"/>
           </a:graphicData>
         </a:graphic>
       </p:graphicFrame>
       <p:graphicFrame>
         <p:nvGraphicFramePr>
-          <p:cNvPr id="10007" name="diamond:12:0070C0"/>
+          <p:cNvPr id="100007" name="diamond:12:0070C0"/>
           <p:cNvGraphicFramePr/>
           <p:nvPr/>
         </p:nvGraphicFramePr>
@@ -6462,13 +7167,13 @@
         </p:xfrm>
         <a:graphic xmlns:a="http://schemas.openxmlformats.org/drawingml/2006/main">
           <a:graphicData uri="http://schemas.openxmlformats.org/drawingml/2006/chart">
-            <c:chart xmlns:r="http://schemas.openxmlformats.org/officeDocument/2006/relationships" xmlns:c="http://schemas.openxmlformats.org/drawingml/2006/chart" r:id="R81302735d6db4427"/>
+            <c:chart xmlns:r="http://schemas.openxmlformats.org/officeDocument/2006/relationships" xmlns:c="http://schemas.openxmlformats.org/drawingml/2006/chart" r:id="R8f8319c2bdb14dd2"/>
           </a:graphicData>
         </a:graphic>
       </p:graphicFrame>
       <p:graphicFrame>
         <p:nvGraphicFramePr>
-          <p:cNvPr id="10008" name="square:8:70AD47"/>
+          <p:cNvPr id="100008" name="square:8:70AD47"/>
           <p:cNvGraphicFramePr/>
           <p:nvPr/>
         </p:nvGraphicFramePr>
@@ -6478,13 +7183,13 @@
         </p:xfrm>
         <a:graphic xmlns:a="http://schemas.openxmlformats.org/drawingml/2006/main">
           <a:graphicData uri="http://schemas.openxmlformats.org/drawingml/2006/chart">
-            <c:chart xmlns:r="http://schemas.openxmlformats.org/officeDocument/2006/relationships" xmlns:c="http://schemas.openxmlformats.org/drawingml/2006/chart" r:id="R75b44a1d2c184f20"/>
+            <c:chart xmlns:r="http://schemas.openxmlformats.org/officeDocument/2006/relationships" xmlns:c="http://schemas.openxmlformats.org/drawingml/2006/chart" r:id="R38b093b8c3124b1a"/>
           </a:graphicData>
         </a:graphic>
       </p:graphicFrame>
       <p:graphicFrame>
         <p:nvGraphicFramePr>
-          <p:cNvPr id="10009" name="triangle:10"/>
+          <p:cNvPr id="100009" name="markercolor=E63946"/>
           <p:cNvGraphicFramePr/>
           <p:nvPr/>
         </p:nvGraphicFramePr>
@@ -6494,7 +7199,7 @@
         </p:xfrm>
         <a:graphic xmlns:a="http://schemas.openxmlformats.org/drawingml/2006/main">
           <a:graphicData uri="http://schemas.openxmlformats.org/drawingml/2006/chart">
-            <c:chart xmlns:r="http://schemas.openxmlformats.org/officeDocument/2006/relationships" xmlns:c="http://schemas.openxmlformats.org/drawingml/2006/chart" r:id="R442d2e128c2f42a8"/>
+            <c:chart xmlns:r="http://schemas.openxmlformats.org/officeDocument/2006/relationships" xmlns:c="http://schemas.openxmlformats.org/drawingml/2006/chart" r:id="R98cdc63ea1cc4618"/>
           </a:graphicData>
         </a:graphic>
       </p:graphicFrame>
@@ -6515,8 +7220,8 @@
       <p:grpSpPr/>
       <p:sp>
         <p:nvSpPr>
-          <p:cNvPr id="10010" name="TextBox 1"/>
-          <p:cNvSpPr/>
+          <p:cNvPr id="100010" name="TextBox 1"/>
+          <p:cNvSpPr txBox="1"/>
           <p:nvPr/>
         </p:nvSpPr>
         <p:spPr>
@@ -6536,14 +7241,14 @@
           <a:p xmlns:a="http://schemas.openxmlformats.org/drawingml/2006/main">
             <a:r>
               <a:rPr lang="en-US" sz="2400" b="1"/>
-              <a:t>Title &amp; legend</a:t>
+              <a:t>Title &amp; legend — title.overlay / legend.overlay</a:t>
             </a:r>
           </a:p>
         </p:txBody>
       </p:sp>
       <p:graphicFrame>
         <p:nvGraphicFramePr>
-          <p:cNvPr id="10011" name="Styled title"/>
+          <p:cNvPr id="100011" name="Styled title"/>
           <p:cNvGraphicFramePr/>
           <p:nvPr/>
         </p:nvGraphicFramePr>
@@ -6553,13 +7258,13 @@
         </p:xfrm>
         <a:graphic xmlns:a="http://schemas.openxmlformats.org/drawingml/2006/main">
           <a:graphicData uri="http://schemas.openxmlformats.org/drawingml/2006/chart">
-            <c:chart xmlns:r="http://schemas.openxmlformats.org/officeDocument/2006/relationships" xmlns:c="http://schemas.openxmlformats.org/drawingml/2006/chart" r:id="R37cf7ee930764c3a"/>
+            <c:chart xmlns:r="http://schemas.openxmlformats.org/officeDocument/2006/relationships" xmlns:c="http://schemas.openxmlformats.org/drawingml/2006/chart" r:id="Rc740088ee00444d0"/>
           </a:graphicData>
         </a:graphic>
       </p:graphicFrame>
       <p:graphicFrame>
         <p:nvGraphicFramePr>
-          <p:cNvPr id="10012" name="legend=top + legendFont"/>
+          <p:cNvPr id="100012" name="legend=top + legendFont"/>
           <p:cNvGraphicFramePr/>
           <p:nvPr/>
         </p:nvGraphicFramePr>
@@ -6569,13 +7274,13 @@
         </p:xfrm>
         <a:graphic xmlns:a="http://schemas.openxmlformats.org/drawingml/2006/main">
           <a:graphicData uri="http://schemas.openxmlformats.org/drawingml/2006/chart">
-            <c:chart xmlns:r="http://schemas.openxmlformats.org/officeDocument/2006/relationships" xmlns:c="http://schemas.openxmlformats.org/drawingml/2006/chart" r:id="R4572e1c0f6c148d6"/>
+            <c:chart xmlns:r="http://schemas.openxmlformats.org/officeDocument/2006/relationships" xmlns:c="http://schemas.openxmlformats.org/drawingml/2006/chart" r:id="R658e29cd4f6a400a"/>
           </a:graphicData>
         </a:graphic>
       </p:graphicFrame>
       <p:graphicFrame>
         <p:nvGraphicFramePr>
-          <p:cNvPr id="10013" name="legend.overlay=true"/>
+          <p:cNvPr id="100013" name="legend.overlay=true"/>
           <p:cNvGraphicFramePr/>
           <p:nvPr/>
         </p:nvGraphicFramePr>
@@ -6585,13 +7290,13 @@
         </p:xfrm>
         <a:graphic xmlns:a="http://schemas.openxmlformats.org/drawingml/2006/main">
           <a:graphicData uri="http://schemas.openxmlformats.org/drawingml/2006/chart">
-            <c:chart xmlns:r="http://schemas.openxmlformats.org/officeDocument/2006/relationships" xmlns:c="http://schemas.openxmlformats.org/drawingml/2006/chart" r:id="R523545c2ed5048aa"/>
+            <c:chart xmlns:r="http://schemas.openxmlformats.org/officeDocument/2006/relationships" xmlns:c="http://schemas.openxmlformats.org/drawingml/2006/chart" r:id="R0c0e6050bbe148d3"/>
           </a:graphicData>
         </a:graphic>
       </p:graphicFrame>
       <p:graphicFrame>
         <p:nvGraphicFramePr>
-          <p:cNvPr id="10014" name="Chart 4"/>
+          <p:cNvPr id="100014" name="title.overlay=true"/>
           <p:cNvGraphicFramePr/>
           <p:nvPr/>
         </p:nvGraphicFramePr>
@@ -6601,7 +7306,7 @@
         </p:xfrm>
         <a:graphic xmlns:a="http://schemas.openxmlformats.org/drawingml/2006/main">
           <a:graphicData uri="http://schemas.openxmlformats.org/drawingml/2006/chart">
-            <c:chart xmlns:r="http://schemas.openxmlformats.org/officeDocument/2006/relationships" xmlns:c="http://schemas.openxmlformats.org/drawingml/2006/chart" r:id="R8f44314c84d44330"/>
+            <c:chart xmlns:r="http://schemas.openxmlformats.org/officeDocument/2006/relationships" xmlns:c="http://schemas.openxmlformats.org/drawingml/2006/chart" r:id="Rdfe0cce18bc948c7"/>
           </a:graphicData>
         </a:graphic>
       </p:graphicFrame>
@@ -6622,8 +7327,8 @@
       <p:grpSpPr/>
       <p:sp>
         <p:nvSpPr>
-          <p:cNvPr id="10015" name="TextBox 1"/>
-          <p:cNvSpPr/>
+          <p:cNvPr id="100015" name="TextBox 1"/>
+          <p:cNvSpPr txBox="1"/>
           <p:nvPr/>
         </p:nvSpPr>
         <p:spPr>
@@ -6650,7 +7355,7 @@
       </p:sp>
       <p:graphicFrame>
         <p:nvGraphicFramePr>
-          <p:cNvPr id="10016" name="value"/>
+          <p:cNvPr id="100016" name="value"/>
           <p:cNvGraphicFramePr/>
           <p:nvPr/>
         </p:nvGraphicFramePr>
@@ -6660,13 +7365,13 @@
         </p:xfrm>
         <a:graphic xmlns:a="http://schemas.openxmlformats.org/drawingml/2006/main">
           <a:graphicData uri="http://schemas.openxmlformats.org/drawingml/2006/chart">
-            <c:chart xmlns:r="http://schemas.openxmlformats.org/officeDocument/2006/relationships" xmlns:c="http://schemas.openxmlformats.org/drawingml/2006/chart" r:id="R8cb119749bb240d3"/>
+            <c:chart xmlns:r="http://schemas.openxmlformats.org/officeDocument/2006/relationships" xmlns:c="http://schemas.openxmlformats.org/drawingml/2006/chart" r:id="R78175b0696f64ba2"/>
           </a:graphicData>
         </a:graphic>
       </p:graphicFrame>
       <p:graphicFrame>
         <p:nvGraphicFramePr>
-          <p:cNvPr id="10017" name="value,series"/>
+          <p:cNvPr id="100017" name="value,series"/>
           <p:cNvGraphicFramePr/>
           <p:nvPr/>
         </p:nvGraphicFramePr>
@@ -6676,13 +7381,13 @@
         </p:xfrm>
         <a:graphic xmlns:a="http://schemas.openxmlformats.org/drawingml/2006/main">
           <a:graphicData uri="http://schemas.openxmlformats.org/drawingml/2006/chart">
-            <c:chart xmlns:r="http://schemas.openxmlformats.org/officeDocument/2006/relationships" xmlns:c="http://schemas.openxmlformats.org/drawingml/2006/chart" r:id="R27ff31b6b3d34c17"/>
+            <c:chart xmlns:r="http://schemas.openxmlformats.org/officeDocument/2006/relationships" xmlns:c="http://schemas.openxmlformats.org/drawingml/2006/chart" r:id="R70b9072c16c147fd"/>
           </a:graphicData>
         </a:graphic>
       </p:graphicFrame>
       <p:graphicFrame>
         <p:nvGraphicFramePr>
-          <p:cNvPr id="10018" name="labelPos=top"/>
+          <p:cNvPr id="100018" name="labelPos=top"/>
           <p:cNvGraphicFramePr/>
           <p:nvPr/>
         </p:nvGraphicFramePr>
@@ -6692,13 +7397,13 @@
         </p:xfrm>
         <a:graphic xmlns:a="http://schemas.openxmlformats.org/drawingml/2006/main">
           <a:graphicData uri="http://schemas.openxmlformats.org/drawingml/2006/chart">
-            <c:chart xmlns:r="http://schemas.openxmlformats.org/officeDocument/2006/relationships" xmlns:c="http://schemas.openxmlformats.org/drawingml/2006/chart" r:id="Ra8da21dfaff14165"/>
+            <c:chart xmlns:r="http://schemas.openxmlformats.org/officeDocument/2006/relationships" xmlns:c="http://schemas.openxmlformats.org/drawingml/2006/chart" r:id="R65b58170c3fe41a7"/>
           </a:graphicData>
         </a:graphic>
       </p:graphicFrame>
       <p:graphicFrame>
         <p:nvGraphicFramePr>
-          <p:cNvPr id="10019" name="dataLabels=none"/>
+          <p:cNvPr id="100019" name="dataLabels=none"/>
           <p:cNvGraphicFramePr/>
           <p:nvPr/>
         </p:nvGraphicFramePr>
@@ -6708,7 +7413,7 @@
         </p:xfrm>
         <a:graphic xmlns:a="http://schemas.openxmlformats.org/drawingml/2006/main">
           <a:graphicData uri="http://schemas.openxmlformats.org/drawingml/2006/chart">
-            <c:chart xmlns:r="http://schemas.openxmlformats.org/officeDocument/2006/relationships" xmlns:c="http://schemas.openxmlformats.org/drawingml/2006/chart" r:id="Rb50718ae200b4b37"/>
+            <c:chart xmlns:r="http://schemas.openxmlformats.org/officeDocument/2006/relationships" xmlns:c="http://schemas.openxmlformats.org/drawingml/2006/chart" r:id="Ra21f6b1873194eb2"/>
           </a:graphicData>
         </a:graphic>
       </p:graphicFrame>
@@ -6729,8 +7434,8 @@
       <p:grpSpPr/>
       <p:sp>
         <p:nvSpPr>
-          <p:cNvPr id="10020" name="TextBox 1"/>
-          <p:cNvSpPr/>
+          <p:cNvPr id="100020" name="TextBox 1"/>
+          <p:cNvSpPr txBox="1"/>
           <p:nvPr/>
         </p:nvSpPr>
         <p:spPr>
@@ -6757,7 +7462,7 @@
       </p:sp>
       <p:graphicFrame>
         <p:nvGraphicFramePr>
-          <p:cNvPr id="10021" name="min/max + titles"/>
+          <p:cNvPr id="100021" name="min/max + titles"/>
           <p:cNvGraphicFramePr/>
           <p:nvPr/>
         </p:nvGraphicFramePr>
@@ -6767,13 +7472,13 @@
         </p:xfrm>
         <a:graphic xmlns:a="http://schemas.openxmlformats.org/drawingml/2006/main">
           <a:graphicData uri="http://schemas.openxmlformats.org/drawingml/2006/chart">
-            <c:chart xmlns:r="http://schemas.openxmlformats.org/officeDocument/2006/relationships" xmlns:c="http://schemas.openxmlformats.org/drawingml/2006/chart" r:id="Rfc072c766448413b"/>
+            <c:chart xmlns:r="http://schemas.openxmlformats.org/officeDocument/2006/relationships" xmlns:c="http://schemas.openxmlformats.org/drawingml/2006/chart" r:id="R93951c6875584bdc"/>
           </a:graphicData>
         </a:graphic>
       </p:graphicFrame>
       <p:graphicFrame>
         <p:nvGraphicFramePr>
-          <p:cNvPr id="10022" name="gridlines + minorGridlines"/>
+          <p:cNvPr id="100022" name="gridlines + minorGridlines"/>
           <p:cNvGraphicFramePr/>
           <p:nvPr/>
         </p:nvGraphicFramePr>
@@ -6783,13 +7488,13 @@
         </p:xfrm>
         <a:graphic xmlns:a="http://schemas.openxmlformats.org/drawingml/2006/main">
           <a:graphicData uri="http://schemas.openxmlformats.org/drawingml/2006/chart">
-            <c:chart xmlns:r="http://schemas.openxmlformats.org/officeDocument/2006/relationships" xmlns:c="http://schemas.openxmlformats.org/drawingml/2006/chart" r:id="R721bccc3a6324993"/>
+            <c:chart xmlns:r="http://schemas.openxmlformats.org/officeDocument/2006/relationships" xmlns:c="http://schemas.openxmlformats.org/drawingml/2006/chart" r:id="R2a2a68740ec94189"/>
           </a:graphicData>
         </a:graphic>
       </p:graphicFrame>
       <p:graphicFrame>
         <p:nvGraphicFramePr>
-          <p:cNvPr id="10023" name="labelrotation=-30"/>
+          <p:cNvPr id="100023" name="labelrotation=-30"/>
           <p:cNvGraphicFramePr/>
           <p:nvPr/>
         </p:nvGraphicFramePr>
@@ -6799,13 +7504,13 @@
         </p:xfrm>
         <a:graphic xmlns:a="http://schemas.openxmlformats.org/drawingml/2006/main">
           <a:graphicData uri="http://schemas.openxmlformats.org/drawingml/2006/chart">
-            <c:chart xmlns:r="http://schemas.openxmlformats.org/officeDocument/2006/relationships" xmlns:c="http://schemas.openxmlformats.org/drawingml/2006/chart" r:id="R9c74d056ecb147ac"/>
+            <c:chart xmlns:r="http://schemas.openxmlformats.org/officeDocument/2006/relationships" xmlns:c="http://schemas.openxmlformats.org/drawingml/2006/chart" r:id="R6e09463b65ce4c71"/>
           </a:graphicData>
         </a:graphic>
       </p:graphicFrame>
       <p:graphicFrame>
         <p:nvGraphicFramePr>
-          <p:cNvPr id="10024" name="logbase=10 (Y)"/>
+          <p:cNvPr id="100024" name="logbase=10 (Y)"/>
           <p:cNvGraphicFramePr/>
           <p:nvPr/>
         </p:nvGraphicFramePr>
@@ -6815,7 +7520,7 @@
         </p:xfrm>
         <a:graphic xmlns:a="http://schemas.openxmlformats.org/drawingml/2006/main">
           <a:graphicData uri="http://schemas.openxmlformats.org/drawingml/2006/chart">
-            <c:chart xmlns:r="http://schemas.openxmlformats.org/officeDocument/2006/relationships" xmlns:c="http://schemas.openxmlformats.org/drawingml/2006/chart" r:id="R45080e9cb4364378"/>
+            <c:chart xmlns:r="http://schemas.openxmlformats.org/officeDocument/2006/relationships" xmlns:c="http://schemas.openxmlformats.org/drawingml/2006/chart" r:id="R0ae1ae7a509340fd"/>
           </a:graphicData>
         </a:graphic>
       </p:graphicFrame>
@@ -6836,8 +7541,8 @@
       <p:grpSpPr/>
       <p:sp>
         <p:nvSpPr>
-          <p:cNvPr id="10025" name="TextBox 1"/>
-          <p:cNvSpPr/>
+          <p:cNvPr id="100025" name="TextBox 1"/>
+          <p:cNvSpPr txBox="1"/>
           <p:nvPr/>
         </p:nvSpPr>
         <p:spPr>
@@ -6864,7 +7569,7 @@
       </p:sp>
       <p:graphicFrame>
         <p:nvGraphicFramePr>
-          <p:cNvPr id="10026" name="colors + seriesoutline"/>
+          <p:cNvPr id="100026" name="colors + seriesoutline"/>
           <p:cNvGraphicFramePr/>
           <p:nvPr/>
         </p:nvGraphicFramePr>
@@ -6874,13 +7579,13 @@
         </p:xfrm>
         <a:graphic xmlns:a="http://schemas.openxmlformats.org/drawingml/2006/main">
           <a:graphicData uri="http://schemas.openxmlformats.org/drawingml/2006/chart">
-            <c:chart xmlns:r="http://schemas.openxmlformats.org/officeDocument/2006/relationships" xmlns:c="http://schemas.openxmlformats.org/drawingml/2006/chart" r:id="R3476eb3bd053462c"/>
+            <c:chart xmlns:r="http://schemas.openxmlformats.org/officeDocument/2006/relationships" xmlns:c="http://schemas.openxmlformats.org/drawingml/2006/chart" r:id="R40737791a5974df4"/>
           </a:graphicData>
         </a:graphic>
       </p:graphicFrame>
       <p:graphicFrame>
         <p:nvGraphicFramePr>
-          <p:cNvPr id="10027" name="gradient + seriesshadow"/>
+          <p:cNvPr id="100027" name="gradient + seriesshadow"/>
           <p:cNvGraphicFramePr/>
           <p:nvPr/>
         </p:nvGraphicFramePr>
@@ -6890,13 +7595,13 @@
         </p:xfrm>
         <a:graphic xmlns:a="http://schemas.openxmlformats.org/drawingml/2006/main">
           <a:graphicData uri="http://schemas.openxmlformats.org/drawingml/2006/chart">
-            <c:chart xmlns:r="http://schemas.openxmlformats.org/officeDocument/2006/relationships" xmlns:c="http://schemas.openxmlformats.org/drawingml/2006/chart" r:id="R420144b846bf42fc"/>
+            <c:chart xmlns:r="http://schemas.openxmlformats.org/officeDocument/2006/relationships" xmlns:c="http://schemas.openxmlformats.org/drawingml/2006/chart" r:id="R6f33b7d5bdc14b06"/>
           </a:graphicData>
         </a:graphic>
       </p:graphicFrame>
       <p:graphicFrame>
         <p:nvGraphicFramePr>
-          <p:cNvPr id="10028" name="transparency=30"/>
+          <p:cNvPr id="100028" name="transparency=30"/>
           <p:cNvGraphicFramePr/>
           <p:nvPr/>
         </p:nvGraphicFramePr>
@@ -6906,13 +7611,13 @@
         </p:xfrm>
         <a:graphic xmlns:a="http://schemas.openxmlformats.org/drawingml/2006/main">
           <a:graphicData uri="http://schemas.openxmlformats.org/drawingml/2006/chart">
-            <c:chart xmlns:r="http://schemas.openxmlformats.org/officeDocument/2006/relationships" xmlns:c="http://schemas.openxmlformats.org/drawingml/2006/chart" r:id="R100b09cfc33f4d7c"/>
+            <c:chart xmlns:r="http://schemas.openxmlformats.org/officeDocument/2006/relationships" xmlns:c="http://schemas.openxmlformats.org/drawingml/2006/chart" r:id="Rbb4bc3dde4f5444a"/>
           </a:graphicData>
         </a:graphic>
       </p:graphicFrame>
       <p:graphicFrame>
         <p:nvGraphicFramePr>
-          <p:cNvPr id="10029" name="per-series gradients"/>
+          <p:cNvPr id="100029" name="per-series gradients"/>
           <p:cNvGraphicFramePr/>
           <p:nvPr/>
         </p:nvGraphicFramePr>
@@ -6922,7 +7627,7 @@
         </p:xfrm>
         <a:graphic xmlns:a="http://schemas.openxmlformats.org/drawingml/2006/main">
           <a:graphicData uri="http://schemas.openxmlformats.org/drawingml/2006/chart">
-            <c:chart xmlns:r="http://schemas.openxmlformats.org/officeDocument/2006/relationships" xmlns:c="http://schemas.openxmlformats.org/drawingml/2006/chart" r:id="R5593bdba868244a1"/>
+            <c:chart xmlns:r="http://schemas.openxmlformats.org/officeDocument/2006/relationships" xmlns:c="http://schemas.openxmlformats.org/drawingml/2006/chart" r:id="R33010ae86c594e68"/>
           </a:graphicData>
         </a:graphic>
       </p:graphicFrame>
@@ -6943,8 +7648,8 @@
       <p:grpSpPr/>
       <p:sp>
         <p:nvSpPr>
-          <p:cNvPr id="10030" name="TextBox 1"/>
-          <p:cNvSpPr/>
+          <p:cNvPr id="100030" name="TextBox 1"/>
+          <p:cNvSpPr txBox="1"/>
           <p:nvPr/>
         </p:nvSpPr>
         <p:spPr>
@@ -6971,7 +7676,7 @@
       </p:sp>
       <p:graphicFrame>
         <p:nvGraphicFramePr>
-          <p:cNvPr id="10031" name="trendline=linear"/>
+          <p:cNvPr id="100031" name="trendline=linear"/>
           <p:cNvGraphicFramePr/>
           <p:nvPr/>
         </p:nvGraphicFramePr>
@@ -6981,13 +7686,13 @@
         </p:xfrm>
         <a:graphic xmlns:a="http://schemas.openxmlformats.org/drawingml/2006/main">
           <a:graphicData uri="http://schemas.openxmlformats.org/drawingml/2006/chart">
-            <c:chart xmlns:r="http://schemas.openxmlformats.org/officeDocument/2006/relationships" xmlns:c="http://schemas.openxmlformats.org/drawingml/2006/chart" r:id="R5d5ea54c8ee74e2a"/>
+            <c:chart xmlns:r="http://schemas.openxmlformats.org/officeDocument/2006/relationships" xmlns:c="http://schemas.openxmlformats.org/drawingml/2006/chart" r:id="R9c2eb818594540e7"/>
           </a:graphicData>
         </a:graphic>
       </p:graphicFrame>
       <p:graphicFrame>
         <p:nvGraphicFramePr>
-          <p:cNvPr id="10032" name="trendline=poly:3"/>
+          <p:cNvPr id="100032" name="trendline=poly:3"/>
           <p:cNvGraphicFramePr/>
           <p:nvPr/>
         </p:nvGraphicFramePr>
@@ -6997,13 +7702,13 @@
         </p:xfrm>
         <a:graphic xmlns:a="http://schemas.openxmlformats.org/drawingml/2006/main">
           <a:graphicData uri="http://schemas.openxmlformats.org/drawingml/2006/chart">
-            <c:chart xmlns:r="http://schemas.openxmlformats.org/officeDocument/2006/relationships" xmlns:c="http://schemas.openxmlformats.org/drawingml/2006/chart" r:id="R8eec42b39b674273"/>
+            <c:chart xmlns:r="http://schemas.openxmlformats.org/officeDocument/2006/relationships" xmlns:c="http://schemas.openxmlformats.org/drawingml/2006/chart" r:id="Rfe6cbee2d0b5449e"/>
           </a:graphicData>
         </a:graphic>
       </p:graphicFrame>
       <p:graphicFrame>
         <p:nvGraphicFramePr>
-          <p:cNvPr id="10033" name="trendline=movingAvg:3"/>
+          <p:cNvPr id="100033" name="trendline=movingAvg:3"/>
           <p:cNvGraphicFramePr/>
           <p:nvPr/>
         </p:nvGraphicFramePr>
@@ -7013,13 +7718,13 @@
         </p:xfrm>
         <a:graphic xmlns:a="http://schemas.openxmlformats.org/drawingml/2006/main">
           <a:graphicData uri="http://schemas.openxmlformats.org/drawingml/2006/chart">
-            <c:chart xmlns:r="http://schemas.openxmlformats.org/officeDocument/2006/relationships" xmlns:c="http://schemas.openxmlformats.org/drawingml/2006/chart" r:id="Red0f825f3cda4c37"/>
+            <c:chart xmlns:r="http://schemas.openxmlformats.org/officeDocument/2006/relationships" xmlns:c="http://schemas.openxmlformats.org/drawingml/2006/chart" r:id="R28f271cb807c4af1"/>
           </a:graphicData>
         </a:graphic>
       </p:graphicFrame>
       <p:graphicFrame>
         <p:nvGraphicFramePr>
-          <p:cNvPr id="10034" name="errbars=stdDev:1"/>
+          <p:cNvPr id="100034" name="errbars=stdDev:1"/>
           <p:cNvGraphicFramePr/>
           <p:nvPr/>
         </p:nvGraphicFramePr>
@@ -7029,7 +7734,7 @@
         </p:xfrm>
         <a:graphic xmlns:a="http://schemas.openxmlformats.org/drawingml/2006/main">
           <a:graphicData uri="http://schemas.openxmlformats.org/drawingml/2006/chart">
-            <c:chart xmlns:r="http://schemas.openxmlformats.org/officeDocument/2006/relationships" xmlns:c="http://schemas.openxmlformats.org/drawingml/2006/chart" r:id="R8ca20bbf00fc4d4c"/>
+            <c:chart xmlns:r="http://schemas.openxmlformats.org/officeDocument/2006/relationships" xmlns:c="http://schemas.openxmlformats.org/drawingml/2006/chart" r:id="R91f00498b9e646d8"/>
           </a:graphicData>
         </a:graphic>
       </p:graphicFrame>
@@ -7050,8 +7755,8 @@
       <p:grpSpPr/>
       <p:sp>
         <p:nvSpPr>
-          <p:cNvPr id="10035" name="TextBox 1"/>
-          <p:cNvSpPr/>
+          <p:cNvPr id="100035" name="TextBox 1"/>
+          <p:cNvSpPr txBox="1"/>
           <p:nvPr/>
         </p:nvSpPr>
         <p:spPr>
@@ -7078,7 +7783,7 @@
       </p:sp>
       <p:graphicFrame>
         <p:nvGraphicFramePr>
-          <p:cNvPr id="10036" name="preset=minimal"/>
+          <p:cNvPr id="100036" name="preset=minimal"/>
           <p:cNvGraphicFramePr/>
           <p:nvPr/>
         </p:nvGraphicFramePr>
@@ -7088,13 +7793,13 @@
         </p:xfrm>
         <a:graphic xmlns:a="http://schemas.openxmlformats.org/drawingml/2006/main">
           <a:graphicData uri="http://schemas.openxmlformats.org/drawingml/2006/chart">
-            <c:chart xmlns:r="http://schemas.openxmlformats.org/officeDocument/2006/relationships" xmlns:c="http://schemas.openxmlformats.org/drawingml/2006/chart" r:id="Rb1b94631f5484c18"/>
+            <c:chart xmlns:r="http://schemas.openxmlformats.org/officeDocument/2006/relationships" xmlns:c="http://schemas.openxmlformats.org/drawingml/2006/chart" r:id="R48fe6df9b5434b4e"/>
           </a:graphicData>
         </a:graphic>
       </p:graphicFrame>
       <p:graphicFrame>
         <p:nvGraphicFramePr>
-          <p:cNvPr id="10037" name="preset=dark"/>
+          <p:cNvPr id="100037" name="preset=dark"/>
           <p:cNvGraphicFramePr/>
           <p:nvPr/>
         </p:nvGraphicFramePr>
@@ -7104,13 +7809,13 @@
         </p:xfrm>
         <a:graphic xmlns:a="http://schemas.openxmlformats.org/drawingml/2006/main">
           <a:graphicData uri="http://schemas.openxmlformats.org/drawingml/2006/chart">
-            <c:chart xmlns:r="http://schemas.openxmlformats.org/officeDocument/2006/relationships" xmlns:c="http://schemas.openxmlformats.org/drawingml/2006/chart" r:id="R8f8be5da7c7f42e2"/>
+            <c:chart xmlns:r="http://schemas.openxmlformats.org/officeDocument/2006/relationships" xmlns:c="http://schemas.openxmlformats.org/drawingml/2006/chart" r:id="Rb144f8f28b564b25"/>
           </a:graphicData>
         </a:graphic>
       </p:graphicFrame>
       <p:graphicFrame>
         <p:nvGraphicFramePr>
-          <p:cNvPr id="10038" name="preset=corporate"/>
+          <p:cNvPr id="100038" name="preset=corporate"/>
           <p:cNvGraphicFramePr/>
           <p:nvPr/>
         </p:nvGraphicFramePr>
@@ -7120,13 +7825,13 @@
         </p:xfrm>
         <a:graphic xmlns:a="http://schemas.openxmlformats.org/drawingml/2006/main">
           <a:graphicData uri="http://schemas.openxmlformats.org/drawingml/2006/chart">
-            <c:chart xmlns:r="http://schemas.openxmlformats.org/officeDocument/2006/relationships" xmlns:c="http://schemas.openxmlformats.org/drawingml/2006/chart" r:id="R7a7d684c88ca4b73"/>
+            <c:chart xmlns:r="http://schemas.openxmlformats.org/officeDocument/2006/relationships" xmlns:c="http://schemas.openxmlformats.org/drawingml/2006/chart" r:id="R9ced0b90c9324236"/>
           </a:graphicData>
         </a:graphic>
       </p:graphicFrame>
       <p:graphicFrame>
         <p:nvGraphicFramePr>
-          <p:cNvPr id="10039" name="chart-series Set per series"/>
+          <p:cNvPr id="100039" name="chart-series Set per series"/>
           <p:cNvGraphicFramePr/>
           <p:nvPr/>
         </p:nvGraphicFramePr>
@@ -7136,7 +7841,114 @@
         </p:xfrm>
         <a:graphic xmlns:a="http://schemas.openxmlformats.org/drawingml/2006/main">
           <a:graphicData uri="http://schemas.openxmlformats.org/drawingml/2006/chart">
-            <c:chart xmlns:r="http://schemas.openxmlformats.org/officeDocument/2006/relationships" xmlns:c="http://schemas.openxmlformats.org/drawingml/2006/chart" r:id="Re20183e679f34b9e"/>
+            <c:chart xmlns:r="http://schemas.openxmlformats.org/officeDocument/2006/relationships" xmlns:c="http://schemas.openxmlformats.org/drawingml/2006/chart" r:id="Rcc9a43065e7f40dd"/>
+          </a:graphicData>
+        </a:graphic>
+      </p:graphicFrame>
+    </p:spTree>
+  </p:cSld>
+</p:sld>
+</file>
+
+<file path=ppt/slides/slide9.xml><?xml version="1.0" encoding="utf-8"?>
+<p:sld xmlns:p="http://schemas.openxmlformats.org/presentationml/2006/main">
+  <p:cSld>
+    <p:spTree>
+      <p:nvGrpSpPr>
+        <p:cNvPr id="1" name=""/>
+        <p:cNvGrpSpPr/>
+        <p:nvPr/>
+      </p:nvGrpSpPr>
+      <p:grpSpPr/>
+      <p:sp>
+        <p:nvSpPr>
+          <p:cNvPr id="100040" name="TextBox 1"/>
+          <p:cNvSpPr txBox="1"/>
+          <p:nvPr/>
+        </p:nvSpPr>
+        <p:spPr>
+          <a:xfrm xmlns:a="http://schemas.openxmlformats.org/drawingml/2006/main">
+            <a:off x="457200" y="274320"/>
+            <a:ext cx="11247120" cy="548640"/>
+          </a:xfrm>
+          <a:prstGeom xmlns:a="http://schemas.openxmlformats.org/drawingml/2006/main" prst="rect">
+            <a:avLst/>
+          </a:prstGeom>
+        </p:spPr>
+        <p:txBody>
+          <a:bodyPr xmlns:a="http://schemas.openxmlformats.org/drawingml/2006/main">
+            <a:normAutofit/>
+          </a:bodyPr>
+          <a:lstStyle xmlns:a="http://schemas.openxmlformats.org/drawingml/2006/main"/>
+          <a:p xmlns:a="http://schemas.openxmlformats.org/drawingml/2006/main">
+            <a:r>
+              <a:rPr lang="en-US" sz="2400" b="1"/>
+              <a:t>series{N}= — named series shorthand (name:v1,v2,…)</a:t>
+            </a:r>
+          </a:p>
+        </p:txBody>
+      </p:sp>
+      <p:graphicFrame>
+        <p:nvGraphicFramePr>
+          <p:cNvPr id="100041" name="series1= + series2="/>
+          <p:cNvGraphicFramePr/>
+          <p:nvPr/>
+        </p:nvGraphicFramePr>
+        <p:xfrm>
+          <a:off xmlns:a="http://schemas.openxmlformats.org/drawingml/2006/main" x="274320" y="960120"/>
+          <a:ext xmlns:a="http://schemas.openxmlformats.org/drawingml/2006/main" cx="5577840" cy="2743200"/>
+        </p:xfrm>
+        <a:graphic xmlns:a="http://schemas.openxmlformats.org/drawingml/2006/main">
+          <a:graphicData uri="http://schemas.openxmlformats.org/drawingml/2006/chart">
+            <c:chart xmlns:r="http://schemas.openxmlformats.org/officeDocument/2006/relationships" xmlns:c="http://schemas.openxmlformats.org/drawingml/2006/chart" r:id="R76f7dc9f04d34e98"/>
+          </a:graphicData>
+        </a:graphic>
+      </p:graphicFrame>
+      <p:graphicFrame>
+        <p:nvGraphicFramePr>
+          <p:cNvPr id="100042" name="three named series"/>
+          <p:cNvGraphicFramePr/>
+          <p:nvPr/>
+        </p:nvGraphicFramePr>
+        <p:xfrm>
+          <a:off xmlns:a="http://schemas.openxmlformats.org/drawingml/2006/main" x="6355080" y="960120"/>
+          <a:ext xmlns:a="http://schemas.openxmlformats.org/drawingml/2006/main" cx="5577840" cy="2743200"/>
+        </p:xfrm>
+        <a:graphic xmlns:a="http://schemas.openxmlformats.org/drawingml/2006/main">
+          <a:graphicData uri="http://schemas.openxmlformats.org/drawingml/2006/chart">
+            <c:chart xmlns:r="http://schemas.openxmlformats.org/officeDocument/2006/relationships" xmlns:c="http://schemas.openxmlformats.org/drawingml/2006/chart" r:id="R6376d11d9d994e74"/>
+          </a:graphicData>
+        </a:graphic>
+      </p:graphicFrame>
+      <p:graphicFrame>
+        <p:nvGraphicFramePr>
+          <p:cNvPr id="100043" name="series1 with colors"/>
+          <p:cNvGraphicFramePr/>
+          <p:nvPr/>
+        </p:nvGraphicFramePr>
+        <p:xfrm>
+          <a:off xmlns:a="http://schemas.openxmlformats.org/drawingml/2006/main" x="274320" y="3886200"/>
+          <a:ext xmlns:a="http://schemas.openxmlformats.org/drawingml/2006/main" cx="5577840" cy="2743200"/>
+        </p:xfrm>
+        <a:graphic xmlns:a="http://schemas.openxmlformats.org/drawingml/2006/main">
+          <a:graphicData uri="http://schemas.openxmlformats.org/drawingml/2006/chart">
+            <c:chart xmlns:r="http://schemas.openxmlformats.org/officeDocument/2006/relationships" xmlns:c="http://schemas.openxmlformats.org/drawingml/2006/chart" r:id="R4f52b29344c04363"/>
+          </a:graphicData>
+        </a:graphic>
+      </p:graphicFrame>
+      <p:graphicFrame>
+        <p:nvGraphicFramePr>
+          <p:cNvPr id="100044" name="series1.* per-series naming + colors="/>
+          <p:cNvGraphicFramePr/>
+          <p:nvPr/>
+        </p:nvGraphicFramePr>
+        <p:xfrm>
+          <a:off xmlns:a="http://schemas.openxmlformats.org/drawingml/2006/main" x="6355080" y="3886200"/>
+          <a:ext xmlns:a="http://schemas.openxmlformats.org/drawingml/2006/main" cx="5577840" cy="2743200"/>
+        </p:xfrm>
+        <a:graphic xmlns:a="http://schemas.openxmlformats.org/drawingml/2006/main">
+          <a:graphicData uri="http://schemas.openxmlformats.org/drawingml/2006/chart">
+            <c:chart xmlns:r="http://schemas.openxmlformats.org/officeDocument/2006/relationships" xmlns:c="http://schemas.openxmlformats.org/drawingml/2006/chart" r:id="R998cb00d01464188"/>
           </a:graphicData>
         </a:graphic>
       </p:graphicFrame>
